--- a/Week_3/ITIL-ITSM-SNOW-INTRO.pptx
+++ b/Week_3/ITIL-ITSM-SNOW-INTRO.pptx
@@ -6935,7 +6935,7 @@
             <a:fld id="{B61BEF0D-F0BB-DE4B-95CE-6DB70DBA9567}" type="datetimeFigureOut">
               <a:rPr lang="en-US" dirty="0"/>
               <a:pPr/>
-              <a:t>10/5/2025</a:t>
+              <a:t>10/6/2025</a:t>
             </a:fld>
             <a:endParaRPr lang="en-US" dirty="0"/>
           </a:p>
@@ -7197,7 +7197,7 @@
             <a:fld id="{B61BEF0D-F0BB-DE4B-95CE-6DB70DBA9567}" type="datetimeFigureOut">
               <a:rPr lang="en-US" dirty="0"/>
               <a:pPr/>
-              <a:t>10/5/2025</a:t>
+              <a:t>10/6/2025</a:t>
             </a:fld>
             <a:endParaRPr lang="en-US" dirty="0"/>
           </a:p>
@@ -7432,7 +7432,7 @@
             <a:fld id="{B61BEF0D-F0BB-DE4B-95CE-6DB70DBA9567}" type="datetimeFigureOut">
               <a:rPr lang="en-US" dirty="0"/>
               <a:pPr/>
-              <a:t>10/5/2025</a:t>
+              <a:t>10/6/2025</a:t>
             </a:fld>
             <a:endParaRPr lang="en-US" dirty="0"/>
           </a:p>
@@ -7672,7 +7672,7 @@
             <a:fld id="{B61BEF0D-F0BB-DE4B-95CE-6DB70DBA9567}" type="datetimeFigureOut">
               <a:rPr lang="en-US" dirty="0"/>
               <a:pPr/>
-              <a:t>10/5/2025</a:t>
+              <a:t>10/6/2025</a:t>
             </a:fld>
             <a:endParaRPr lang="en-US" dirty="0"/>
           </a:p>
@@ -7980,7 +7980,7 @@
             <a:fld id="{B61BEF0D-F0BB-DE4B-95CE-6DB70DBA9567}" type="datetimeFigureOut">
               <a:rPr lang="en-US" dirty="0"/>
               <a:pPr/>
-              <a:t>10/5/2025</a:t>
+              <a:t>10/6/2025</a:t>
             </a:fld>
             <a:endParaRPr lang="en-US" dirty="0"/>
           </a:p>
@@ -8281,7 +8281,7 @@
             <a:fld id="{B61BEF0D-F0BB-DE4B-95CE-6DB70DBA9567}" type="datetimeFigureOut">
               <a:rPr lang="en-US" dirty="0"/>
               <a:pPr/>
-              <a:t>10/5/2025</a:t>
+              <a:t>10/6/2025</a:t>
             </a:fld>
             <a:endParaRPr lang="en-US" dirty="0"/>
           </a:p>
@@ -8702,7 +8702,7 @@
             <a:fld id="{B61BEF0D-F0BB-DE4B-95CE-6DB70DBA9567}" type="datetimeFigureOut">
               <a:rPr lang="en-US" dirty="0"/>
               <a:pPr/>
-              <a:t>10/5/2025</a:t>
+              <a:t>10/6/2025</a:t>
             </a:fld>
             <a:endParaRPr lang="en-US" dirty="0"/>
           </a:p>
@@ -8865,7 +8865,7 @@
             <a:fld id="{B61BEF0D-F0BB-DE4B-95CE-6DB70DBA9567}" type="datetimeFigureOut">
               <a:rPr lang="en-US" dirty="0"/>
               <a:pPr/>
-              <a:t>10/5/2025</a:t>
+              <a:t>10/6/2025</a:t>
             </a:fld>
             <a:endParaRPr lang="en-US" dirty="0"/>
           </a:p>
@@ -8962,7 +8962,7 @@
             <a:fld id="{B61BEF0D-F0BB-DE4B-95CE-6DB70DBA9567}" type="datetimeFigureOut">
               <a:rPr lang="en-US" dirty="0"/>
               <a:pPr/>
-              <a:t>10/5/2025</a:t>
+              <a:t>10/6/2025</a:t>
             </a:fld>
             <a:endParaRPr lang="en-US" dirty="0"/>
           </a:p>
@@ -9340,7 +9340,7 @@
             <a:fld id="{B61BEF0D-F0BB-DE4B-95CE-6DB70DBA9567}" type="datetimeFigureOut">
               <a:rPr lang="en-US" dirty="0"/>
               <a:pPr/>
-              <a:t>10/5/2025</a:t>
+              <a:t>10/6/2025</a:t>
             </a:fld>
             <a:endParaRPr lang="en-US" dirty="0"/>
           </a:p>
@@ -9626,7 +9626,7 @@
             <a:fld id="{B61BEF0D-F0BB-DE4B-95CE-6DB70DBA9567}" type="datetimeFigureOut">
               <a:rPr lang="en-US" dirty="0"/>
               <a:pPr/>
-              <a:t>10/5/2025</a:t>
+              <a:t>10/6/2025</a:t>
             </a:fld>
             <a:endParaRPr lang="en-US" dirty="0"/>
           </a:p>
@@ -9865,7 +9865,7 @@
             <a:fld id="{B61BEF0D-F0BB-DE4B-95CE-6DB70DBA9567}" type="datetimeFigureOut">
               <a:rPr lang="en-US" dirty="0"/>
               <a:pPr/>
-              <a:t>10/5/2025</a:t>
+              <a:t>10/6/2025</a:t>
             </a:fld>
             <a:endParaRPr lang="en-US" dirty="0"/>
           </a:p>
@@ -14774,8 +14774,13 @@
             <a:pPr marL="305435" indent="-305435"/>
             <a:r>
               <a:rPr lang="en-US" dirty="0"/>
-              <a:t>Can be considered SaaS / PaaS</a:t>
-            </a:r>
+              <a:t>Can be considered SaaS / PaaS / </a:t>
+            </a:r>
+            <a:r>
+              <a:rPr lang="en-US" dirty="0" err="1"/>
+              <a:t>aPaaS</a:t>
+            </a:r>
+            <a:endParaRPr lang="en-US" dirty="0"/>
           </a:p>
           <a:p>
             <a:pPr marL="305435" indent="-305435"/>
@@ -16060,15 +16065,20 @@
         </p:spPr>
         <p:txBody>
           <a:bodyPr>
-            <a:normAutofit/>
+            <a:normAutofit fontScale="92500" lnSpcReduction="10000"/>
           </a:bodyPr>
           <a:lstStyle/>
           <a:p>
             <a:pPr marL="305435" indent="-305435"/>
             <a:r>
               <a:rPr lang="en-US" dirty="0"/>
-              <a:t>As previously stated, SNOW can be considered a PaaS or SaaS</a:t>
-            </a:r>
+              <a:t>As previously stated, SNOW can be considered a PaaS, SaaS, or </a:t>
+            </a:r>
+            <a:r>
+              <a:rPr lang="en-US" dirty="0" err="1"/>
+              <a:t>aPaaS</a:t>
+            </a:r>
+            <a:endParaRPr lang="en-US" dirty="0"/>
           </a:p>
           <a:p>
             <a:pPr marL="629920" lvl="1" indent="-305435">
@@ -16117,6 +16127,27 @@
               <a:rPr lang="en-US" dirty="0"/>
               <a:t>To the customer, it is a software to interact with</a:t>
             </a:r>
+          </a:p>
+          <a:p>
+            <a:pPr marL="629920" lvl="1" indent="-305435">
+              <a:buFont typeface="Courier New" panose="05020102010507070707" pitchFamily="18" charset="2"/>
+              <a:buChar char="o"/>
+            </a:pPr>
+            <a:r>
+              <a:rPr lang="en-US" b="1" dirty="0" err="1"/>
+              <a:t>aPaaS</a:t>
+            </a:r>
+            <a:r>
+              <a:rPr lang="en-US" dirty="0"/>
+              <a:t> – Application Platform as a Service</a:t>
+            </a:r>
+          </a:p>
+          <a:p>
+            <a:pPr marL="899795" lvl="2" indent="-269875">
+              <a:buFont typeface="Wingdings" panose="05020102010507070707" pitchFamily="18" charset="2"/>
+              <a:buChar char="§"/>
+            </a:pPr>
+            <a:endParaRPr lang="en-US" dirty="0"/>
           </a:p>
           <a:p>
             <a:pPr marL="305435" indent="-305435"/>
